--- a/docs/deliverables/ConferenceCheck Presentation.pptx
+++ b/docs/deliverables/ConferenceCheck Presentation.pptx
@@ -17541,7 +17541,7 @@
                           </a:solidFill>
                           <a:latin typeface="Calibri"/>
                         </a:rPr>
-                        <a:t>VS Code, Android SDK, PHPUnit, PHPStan level 7, Pint, flutter analyze</a:t>
+                        <a:t>Android SDK and emulator, PHPUnit, PHPStan level 7, Pint, flutter analyze</a:t>
                       </a:r>
                     </a:p>
                   </a:txBody>
